--- a/references/figures/감정의인상_도해.pptx
+++ b/references/figures/감정의인상_도해.pptx
@@ -1109,11 +1109,11 @@
             </a:avLst>
           </a:prstGeom>
           <a:solidFill>
-            <a:srgbClr val="AADBDF"/>
+            <a:srgbClr val="81EAF8"/>
           </a:solidFill>
           <a:ln w="12700">
             <a:solidFill>
-              <a:srgbClr val="AADBDF"/>
+              <a:srgbClr val="81EAF8"/>
             </a:solidFill>
             <a:prstDash val="solid"/>
           </a:ln>
@@ -1136,11 +1136,11 @@
             </a:avLst>
           </a:prstGeom>
           <a:solidFill>
-            <a:srgbClr val="55BCC7"/>
+            <a:srgbClr val="3DE8FF"/>
           </a:solidFill>
           <a:ln w="12700">
             <a:solidFill>
-              <a:srgbClr val="55BCC7"/>
+              <a:srgbClr val="3DE8FF"/>
             </a:solidFill>
             <a:prstDash val="solid"/>
           </a:ln>
@@ -1163,11 +1163,11 @@
             </a:avLst>
           </a:prstGeom>
           <a:solidFill>
-            <a:srgbClr val="009EB0"/>
+            <a:srgbClr val="00E1FF"/>
           </a:solidFill>
           <a:ln w="12700">
             <a:solidFill>
-              <a:srgbClr val="009EB0"/>
+              <a:srgbClr val="00E1FF"/>
             </a:solidFill>
             <a:prstDash val="solid"/>
           </a:ln>
@@ -1229,11 +1229,11 @@
             </a:avLst>
           </a:prstGeom>
           <a:solidFill>
-            <a:srgbClr val="F6CAB8"/>
+            <a:srgbClr val="F89D81"/>
           </a:solidFill>
           <a:ln w="12700">
             <a:solidFill>
-              <a:srgbClr val="F6CAB8"/>
+              <a:srgbClr val="F89D81"/>
             </a:solidFill>
             <a:prstDash val="solid"/>
           </a:ln>
@@ -1256,11 +1256,11 @@
             </a:avLst>
           </a:prstGeom>
           <a:solidFill>
-            <a:srgbClr val="F29977"/>
+            <a:srgbClr val="FF6A3D"/>
           </a:solidFill>
           <a:ln w="12700">
             <a:solidFill>
-              <a:srgbClr val="F29977"/>
+              <a:srgbClr val="FF6A3D"/>
             </a:solidFill>
             <a:prstDash val="solid"/>
           </a:ln>
@@ -1283,11 +1283,11 @@
             </a:avLst>
           </a:prstGeom>
           <a:solidFill>
-            <a:srgbClr val="EE6836"/>
+            <a:srgbClr val="FF3C00"/>
           </a:solidFill>
           <a:ln w="12700">
             <a:solidFill>
-              <a:srgbClr val="EE6836"/>
+              <a:srgbClr val="FF3C00"/>
             </a:solidFill>
             <a:prstDash val="solid"/>
           </a:ln>
@@ -1349,11 +1349,11 @@
             </a:avLst>
           </a:prstGeom>
           <a:solidFill>
-            <a:srgbClr val="D6D1E7"/>
+            <a:srgbClr val="AD81F8"/>
           </a:solidFill>
           <a:ln w="12700">
             <a:solidFill>
-              <a:srgbClr val="D6D1E7"/>
+              <a:srgbClr val="AD81F8"/>
             </a:solidFill>
             <a:prstDash val="solid"/>
           </a:ln>
@@ -1376,11 +1376,11 @@
             </a:avLst>
           </a:prstGeom>
           <a:solidFill>
-            <a:srgbClr val="B1A6D7"/>
+            <a:srgbClr val="843DFF"/>
           </a:solidFill>
           <a:ln w="12700">
             <a:solidFill>
-              <a:srgbClr val="B1A6D7"/>
+              <a:srgbClr val="843DFF"/>
             </a:solidFill>
             <a:prstDash val="solid"/>
           </a:ln>
@@ -1403,11 +1403,11 @@
             </a:avLst>
           </a:prstGeom>
           <a:solidFill>
-            <a:srgbClr val="8C7CC8"/>
+            <a:srgbClr val="5E00FF"/>
           </a:solidFill>
           <a:ln w="12700">
             <a:solidFill>
-              <a:srgbClr val="8C7CC8"/>
+              <a:srgbClr val="5E00FF"/>
             </a:solidFill>
             <a:prstDash val="solid"/>
           </a:ln>
@@ -1469,11 +1469,11 @@
             </a:avLst>
           </a:prstGeom>
           <a:solidFill>
-            <a:srgbClr val="E5D4B6"/>
+            <a:srgbClr val="F8CD81"/>
           </a:solidFill>
           <a:ln w="12700">
             <a:solidFill>
-              <a:srgbClr val="E5D4B6"/>
+              <a:srgbClr val="F8CD81"/>
             </a:solidFill>
             <a:prstDash val="solid"/>
           </a:ln>
@@ -1496,11 +1496,11 @@
             </a:avLst>
           </a:prstGeom>
           <a:solidFill>
-            <a:srgbClr val="CFAD73"/>
+            <a:srgbClr val="FFB83D"/>
           </a:solidFill>
           <a:ln w="12700">
             <a:solidFill>
-              <a:srgbClr val="CFAD73"/>
+              <a:srgbClr val="FFB83D"/>
             </a:solidFill>
             <a:prstDash val="solid"/>
           </a:ln>
@@ -1523,11 +1523,11 @@
             </a:avLst>
           </a:prstGeom>
           <a:solidFill>
-            <a:srgbClr val="BA8630"/>
+            <a:srgbClr val="FFA200"/>
           </a:solidFill>
           <a:ln w="12700">
             <a:solidFill>
-              <a:srgbClr val="BA8630"/>
+              <a:srgbClr val="FFA200"/>
             </a:solidFill>
             <a:prstDash val="solid"/>
           </a:ln>

--- a/references/figures/감정의인상_도해.pptx
+++ b/references/figures/감정의인상_도해.pptx
@@ -1109,11 +1109,11 @@
             </a:avLst>
           </a:prstGeom>
           <a:solidFill>
-            <a:srgbClr val="81EAF8"/>
+            <a:srgbClr val="96E2EC"/>
           </a:solidFill>
           <a:ln w="12700">
             <a:solidFill>
-              <a:srgbClr val="81EAF8"/>
+              <a:srgbClr val="96E2EC"/>
             </a:solidFill>
             <a:prstDash val="solid"/>
           </a:ln>
@@ -1136,11 +1136,11 @@
             </a:avLst>
           </a:prstGeom>
           <a:solidFill>
-            <a:srgbClr val="3DE8FF"/>
+            <a:srgbClr val="49D2E3"/>
           </a:solidFill>
           <a:ln w="12700">
             <a:solidFill>
-              <a:srgbClr val="3DE8FF"/>
+              <a:srgbClr val="49D2E3"/>
             </a:solidFill>
             <a:prstDash val="solid"/>
           </a:ln>
@@ -1163,11 +1163,11 @@
             </a:avLst>
           </a:prstGeom>
           <a:solidFill>
-            <a:srgbClr val="00E1FF"/>
+            <a:srgbClr val="00C0D8"/>
           </a:solidFill>
           <a:ln w="12700">
             <a:solidFill>
-              <a:srgbClr val="00E1FF"/>
+              <a:srgbClr val="00C0D8"/>
             </a:solidFill>
             <a:prstDash val="solid"/>
           </a:ln>
@@ -1229,11 +1229,11 @@
             </a:avLst>
           </a:prstGeom>
           <a:solidFill>
-            <a:srgbClr val="F89D81"/>
+            <a:srgbClr val="F7B49C"/>
           </a:solidFill>
           <a:ln w="12700">
             <a:solidFill>
-              <a:srgbClr val="F89D81"/>
+              <a:srgbClr val="F7B49C"/>
             </a:solidFill>
             <a:prstDash val="solid"/>
           </a:ln>
@@ -1256,11 +1256,11 @@
             </a:avLst>
           </a:prstGeom>
           <a:solidFill>
-            <a:srgbClr val="FF6A3D"/>
+            <a:srgbClr val="F8825A"/>
           </a:solidFill>
           <a:ln w="12700">
             <a:solidFill>
-              <a:srgbClr val="FF6A3D"/>
+              <a:srgbClr val="F8825A"/>
             </a:solidFill>
             <a:prstDash val="solid"/>
           </a:ln>
@@ -1283,11 +1283,11 @@
             </a:avLst>
           </a:prstGeom>
           <a:solidFill>
-            <a:srgbClr val="FF3C00"/>
+            <a:srgbClr val="F6521B"/>
           </a:solidFill>
           <a:ln w="12700">
             <a:solidFill>
-              <a:srgbClr val="FF3C00"/>
+              <a:srgbClr val="F6521B"/>
             </a:solidFill>
             <a:prstDash val="solid"/>
           </a:ln>
@@ -1349,11 +1349,11 @@
             </a:avLst>
           </a:prstGeom>
           <a:solidFill>
-            <a:srgbClr val="AD81F8"/>
+            <a:srgbClr val="C2A9F0"/>
           </a:solidFill>
           <a:ln w="12700">
             <a:solidFill>
-              <a:srgbClr val="AD81F8"/>
+              <a:srgbClr val="C2A9F0"/>
             </a:solidFill>
             <a:prstDash val="solid"/>
           </a:ln>
@@ -1376,11 +1376,11 @@
             </a:avLst>
           </a:prstGeom>
           <a:solidFill>
-            <a:srgbClr val="843DFF"/>
+            <a:srgbClr val="9A72EB"/>
           </a:solidFill>
           <a:ln w="12700">
             <a:solidFill>
-              <a:srgbClr val="843DFF"/>
+              <a:srgbClr val="9A72EB"/>
             </a:solidFill>
             <a:prstDash val="solid"/>
           </a:ln>
@@ -1403,11 +1403,11 @@
             </a:avLst>
           </a:prstGeom>
           <a:solidFill>
-            <a:srgbClr val="5E00FF"/>
+            <a:srgbClr val="753EE4"/>
           </a:solidFill>
           <a:ln w="12700">
             <a:solidFill>
-              <a:srgbClr val="5E00FF"/>
+              <a:srgbClr val="753EE4"/>
             </a:solidFill>
             <a:prstDash val="solid"/>
           </a:ln>
@@ -1469,11 +1469,11 @@
             </a:avLst>
           </a:prstGeom>
           <a:solidFill>
-            <a:srgbClr val="F8CD81"/>
+            <a:srgbClr val="EED09C"/>
           </a:solidFill>
           <a:ln w="12700">
             <a:solidFill>
-              <a:srgbClr val="F8CD81"/>
+              <a:srgbClr val="EED09C"/>
             </a:solidFill>
             <a:prstDash val="solid"/>
           </a:ln>
@@ -1496,11 +1496,11 @@
             </a:avLst>
           </a:prstGeom>
           <a:solidFill>
-            <a:srgbClr val="FFB83D"/>
+            <a:srgbClr val="E7B258"/>
           </a:solidFill>
           <a:ln w="12700">
             <a:solidFill>
-              <a:srgbClr val="FFB83D"/>
+              <a:srgbClr val="E7B258"/>
             </a:solidFill>
             <a:prstDash val="solid"/>
           </a:ln>
@@ -1523,11 +1523,11 @@
             </a:avLst>
           </a:prstGeom>
           <a:solidFill>
-            <a:srgbClr val="FFA200"/>
+            <a:srgbClr val="DC9418"/>
           </a:solidFill>
           <a:ln w="12700">
             <a:solidFill>
-              <a:srgbClr val="FFA200"/>
+              <a:srgbClr val="DC9418"/>
             </a:solidFill>
             <a:prstDash val="solid"/>
           </a:ln>
